--- a/pptx/maio_2026/ITAPOA_TERMINAIS_PORTUARIOS_S-.pptx
+++ b/pptx/maio_2026/ITAPOA_TERMINAIS_PORTUARIOS_S-.pptx
@@ -147,10 +147,10 @@
               <c:strCache>
                 <c:ptCount val="2"/>
                 <c:pt idx="0">
-                  <c:v>Maio 2026</c:v>
+                  <c:v>Abril 2026</c:v>
                 </c:pt>
                 <c:pt idx="1">
-                  <c:v>Abril 2026</c:v>
+                  <c:v>Maio 2026</c:v>
                 </c:pt>
               </c:strCache>
             </c:strRef>
@@ -161,11 +161,12 @@
               <c:numCache>
                 <c:formatCode>General</c:formatCode>
                 <c:ptCount val="2"/>
+                <c:formatCode>General</c:formatCode>
                 <c:pt idx="0">
-                  <c:v>596</c:v>
+                  <c:v>34</c:v>
                 </c:pt>
                 <c:pt idx="1">
-                  <c:v>575</c:v>
+                  <c:v>38</c:v>
                 </c:pt>
               </c:numCache>
             </c:numRef>
@@ -196,10 +197,10 @@
               <c:strCache>
                 <c:ptCount val="2"/>
                 <c:pt idx="0">
-                  <c:v>Maio 2026</c:v>
+                  <c:v>Abril 2026</c:v>
                 </c:pt>
                 <c:pt idx="1">
-                  <c:v>Abril 2026</c:v>
+                  <c:v>Maio 2026</c:v>
                 </c:pt>
               </c:strCache>
             </c:strRef>
@@ -210,11 +211,12 @@
               <c:numCache>
                 <c:formatCode>General</c:formatCode>
                 <c:ptCount val="2"/>
+                <c:formatCode>General</c:formatCode>
                 <c:pt idx="0">
-                  <c:v>22</c:v>
+                  <c:v>0</c:v>
                 </c:pt>
                 <c:pt idx="1">
-                  <c:v>2</c:v>
+                  <c:v>0</c:v>
                 </c:pt>
               </c:numCache>
             </c:numRef>
@@ -4226,6 +4228,23 @@
                     <a:p>
                       <a:pPr algn="l"/>
                       <a:r>
+                        <a:t>34</a:t>
+                      </a:r>
+                    </a:p>
+                  </a:txBody>
+                  <a:tcPr>
+                    <a:solidFill>
+                      <a:srgbClr val="FFFFFF"/>
+                    </a:solidFill>
+                  </a:tcPr>
+                </a:tc>
+                <a:tc>
+                  <a:txBody>
+                    <a:bodyPr/>
+                    <a:lstStyle/>
+                    <a:p>
+                      <a:pPr algn="l"/>
+                      <a:r>
                         <a:t>38</a:t>
                       </a:r>
                     </a:p>
@@ -4243,24 +4262,7 @@
                     <a:p>
                       <a:pPr algn="l"/>
                       <a:r>
-                        <a:t>38</a:t>
-                      </a:r>
-                    </a:p>
-                  </a:txBody>
-                  <a:tcPr>
-                    <a:solidFill>
-                      <a:srgbClr val="FFFFFF"/>
-                    </a:solidFill>
-                  </a:tcPr>
-                </a:tc>
-                <a:tc>
-                  <a:txBody>
-                    <a:bodyPr/>
-                    <a:lstStyle/>
-                    <a:p>
-                      <a:pPr algn="l"/>
-                      <a:r>
-                        <a:t>0</a:t>
+                        <a:t>4</a:t>
                       </a:r>
                     </a:p>
                   </a:txBody>
@@ -4330,7 +4332,7 @@
                     <a:p>
                       <a:pPr algn="l"/>
                       <a:r>
-                        <a:t>+4</a:t>
+                        <a:t>4</a:t>
                       </a:r>
                     </a:p>
                   </a:txBody>
@@ -4366,23 +4368,6 @@
                     <a:p>
                       <a:pPr algn="l"/>
                       <a:r>
-                        <a:t>4</a:t>
-                      </a:r>
-                    </a:p>
-                  </a:txBody>
-                  <a:tcPr>
-                    <a:solidFill>
-                      <a:srgbClr val="FFFFFF"/>
-                    </a:solidFill>
-                  </a:tcPr>
-                </a:tc>
-                <a:tc>
-                  <a:txBody>
-                    <a:bodyPr/>
-                    <a:lstStyle/>
-                    <a:p>
-                      <a:pPr algn="l"/>
-                      <a:r>
                         <a:t>0</a:t>
                       </a:r>
                     </a:p>
@@ -4400,7 +4385,24 @@
                     <a:p>
                       <a:pPr algn="l"/>
                       <a:r>
-                        <a:t>-4</a:t>
+                        <a:t>0</a:t>
+                      </a:r>
+                    </a:p>
+                  </a:txBody>
+                  <a:tcPr>
+                    <a:solidFill>
+                      <a:srgbClr val="FFFFFF"/>
+                    </a:solidFill>
+                  </a:tcPr>
+                </a:tc>
+                <a:tc>
+                  <a:txBody>
+                    <a:bodyPr/>
+                    <a:lstStyle/>
+                    <a:p>
+                      <a:pPr algn="l"/>
+                      <a:r>
+                        <a:t>0</a:t>
                       </a:r>
                     </a:p>
                   </a:txBody>
@@ -4436,7 +4438,7 @@
                     <a:p>
                       <a:pPr algn="l"/>
                       <a:r>
-                        <a:t>89.5%</a:t>
+                        <a:t>100%</a:t>
                       </a:r>
                     </a:p>
                   </a:txBody>
@@ -4470,7 +4472,7 @@
                     <a:p>
                       <a:pPr algn="l"/>
                       <a:r>
-                        <a:t>+10.5pp</a:t>
+                        <a:t>+0.0pp</a:t>
                       </a:r>
                     </a:p>
                   </a:txBody>
@@ -4885,23 +4887,6 @@
                     <a:p>
                       <a:pPr algn="l"/>
                       <a:r>
-                        <a:t>38</a:t>
-                      </a:r>
-                    </a:p>
-                  </a:txBody>
-                  <a:tcPr>
-                    <a:solidFill>
-                      <a:srgbClr val="F2F2F2"/>
-                    </a:solidFill>
-                  </a:tcPr>
-                </a:tc>
-                <a:tc>
-                  <a:txBody>
-                    <a:bodyPr/>
-                    <a:lstStyle/>
-                    <a:p>
-                      <a:pPr algn="l"/>
-                      <a:r>
                         <a:t>34</a:t>
                       </a:r>
                     </a:p>
@@ -4919,24 +4904,41 @@
                     <a:p>
                       <a:pPr algn="l"/>
                       <a:r>
-                        <a:t>4</a:t>
-                      </a:r>
-                    </a:p>
-                  </a:txBody>
-                  <a:tcPr>
-                    <a:solidFill>
-                      <a:srgbClr val="F2F2F2"/>
-                    </a:solidFill>
-                  </a:tcPr>
-                </a:tc>
-                <a:tc>
-                  <a:txBody>
-                    <a:bodyPr/>
-                    <a:lstStyle/>
-                    <a:p>
-                      <a:pPr algn="l"/>
-                      <a:r>
-                        <a:t>89.5%</a:t>
+                        <a:t>34</a:t>
+                      </a:r>
+                    </a:p>
+                  </a:txBody>
+                  <a:tcPr>
+                    <a:solidFill>
+                      <a:srgbClr val="F2F2F2"/>
+                    </a:solidFill>
+                  </a:tcPr>
+                </a:tc>
+                <a:tc>
+                  <a:txBody>
+                    <a:bodyPr/>
+                    <a:lstStyle/>
+                    <a:p>
+                      <a:pPr algn="l"/>
+                      <a:r>
+                        <a:t>0</a:t>
+                      </a:r>
+                    </a:p>
+                  </a:txBody>
+                  <a:tcPr>
+                    <a:solidFill>
+                      <a:srgbClr val="F2F2F2"/>
+                    </a:solidFill>
+                  </a:tcPr>
+                </a:tc>
+                <a:tc>
+                  <a:txBody>
+                    <a:bodyPr/>
+                    <a:lstStyle/>
+                    <a:p>
+                      <a:pPr algn="l"/>
+                      <a:r>
+                        <a:t>100%</a:t>
                       </a:r>
                     </a:p>
                   </a:txBody>
@@ -5024,7 +5026,7 @@
                 </a:solidFill>
                 <a:latin typeface="Calibri"/>
               </a:rPr>
-              <a:t>PERFORMANCE: 89.5% → 100.0% - Excelente</a:t>
+              <a:t>PERFORMANCE: 100% → 100.0% - Excelente</a:t>
             </a:r>
           </a:p>
         </p:txBody>
@@ -6895,7 +6897,7 @@
                 </a:solidFill>
                 <a:latin typeface="Calibri"/>
               </a:rPr>
-              <a:t>TOP DESTINATARIOS (100 pontos)</a:t>
+              <a:t>TOP DESTINATARIOS (8 pontos)</a:t>
             </a:r>
           </a:p>
         </p:txBody>
@@ -7158,7 +7160,7 @@
                     <a:p>
                       <a:pPr algn="l"/>
                       <a:r>
-                        <a:t>VCH - IMPORTADORA, E - GA - GARUVA / SC</a:t>
+                        <a:t>VCH - IMPORTADORA, E - GARUVA / SC</a:t>
                       </a:r>
                     </a:p>
                   </a:txBody>
@@ -7279,7 +7281,7 @@
                     <a:p>
                       <a:pPr algn="l"/>
                       <a:r>
-                        <a:t>MAFLOW DO BRASIL LTD - CU - CURITIBA / P</a:t>
+                        <a:t>MAFLOW DO BRASIL LTD - CURITIBA / PR</a:t>
                       </a:r>
                     </a:p>
                   </a:txBody>
@@ -7400,7 +7402,7 @@
                     <a:p>
                       <a:pPr algn="l"/>
                       <a:r>
-                        <a:t>INTELBRAS SA INDUSTR - SA - SAO JOSE / S</a:t>
+                        <a:t>INTELBRAS SA INDUSTR - SAO JOSE / SC</a:t>
                       </a:r>
                     </a:p>
                   </a:txBody>
@@ -7521,7 +7523,7 @@
                     <a:p>
                       <a:pPr algn="l"/>
                       <a:r>
-                        <a:t>LOJAS AVENIDA S.A - CAMPO - CAMPO GRANDE</a:t>
+                        <a:t>LOJAS AVENIDA S.A - CAMPO GRANDE / MS</a:t>
                       </a:r>
                     </a:p>
                   </a:txBody>
@@ -7642,7 +7644,7 @@
                     <a:p>
                       <a:pPr algn="l"/>
                       <a:r>
-                        <a:t>INTELBRAS S.A. INDUS - SA - SAO JOSE / S</a:t>
+                        <a:t>INTELBRAS S.A. INDUS - SAO JOSE / SC</a:t>
                       </a:r>
                     </a:p>
                   </a:txBody>
@@ -7763,7 +7765,7 @@
                     <a:p>
                       <a:pPr algn="l"/>
                       <a:r>
-                        <a:t>DRUGOVICH AUTO PECAS - IT - ITAJAI / SC</a:t>
+                        <a:t>DRUGOVICH AUTO PECAS - ITAJAI / SC</a:t>
                       </a:r>
                     </a:p>
                   </a:txBody>
@@ -7884,7 +7886,7 @@
                     <a:p>
                       <a:pPr algn="l"/>
                       <a:r>
-                        <a:t>ITAPOA TERMINAIS POR - IT - ITAPOA / SC</a:t>
+                        <a:t>ITAPOA TERMINAIS POR - ITAPOA / SC</a:t>
                       </a:r>
                     </a:p>
                   </a:txBody>
@@ -8005,7 +8007,7 @@
                     <a:p>
                       <a:pPr algn="l"/>
                       <a:r>
-                        <a:t>HYOSUNG BRASIL INDUS - AR - ARAQUARI / S</a:t>
+                        <a:t>HYOSUNG BRASIL INDUS - ARAQUARI / SC</a:t>
                       </a:r>
                     </a:p>
                   </a:txBody>
@@ -9247,66 +9249,6 @@
           </a:p>
         </p:txBody>
       </p:sp>
-      <p:sp useBgFill="1">
-        <p:nvSpPr>
-          <p:cNvPr id="29" name="Rectangle 22">
-            <a:extLst>
-              <a:ext uri="{FF2B5EF4-FFF2-40B4-BE49-F238E27FC236}">
-                <a16:creationId xmlns:a16="http://schemas.microsoft.com/office/drawing/2014/main" id="{F0087D53-9295-4463-AAE4-D5C626046E9F}"/>
-              </a:ext>
-              <a:ext uri="{C183D7F6-B498-43B3-948B-1728B52AA6E4}">
-                <adec:decorative xmlns:adec="http://schemas.microsoft.com/office/drawing/2017/decorative" val="1"/>
-              </a:ext>
-            </a:extLst>
-          </p:cNvPr>
-          <p:cNvSpPr>
-            <a:spLocks noGrp="1" noRot="1" noChangeAspect="1" noMove="1" noResize="1" noEditPoints="1" noAdjustHandles="1" noChangeArrowheads="1" noChangeShapeType="1" noTextEdit="1"/>
-          </p:cNvSpPr>
-          <p:nvPr>
-            <p:extLst>
-              <p:ext uri="{386F3935-93C4-4BCD-93E2-E3B085C9AB24}">
-                <p16:designElem xmlns:p16="http://schemas.microsoft.com/office/powerpoint/2015/main" val="1"/>
-              </p:ext>
-            </p:extLst>
-          </p:nvPr>
-        </p:nvSpPr>
-        <p:spPr>
-          <a:xfrm>
-            <a:off x="0" y="0"/>
-            <a:ext cx="12188952" cy="6858000"/>
-          </a:xfrm>
-          <a:prstGeom prst="rect">
-            <a:avLst/>
-          </a:prstGeom>
-          <a:ln>
-            <a:noFill/>
-          </a:ln>
-        </p:spPr>
-        <p:style>
-          <a:lnRef idx="2">
-            <a:schemeClr val="accent1">
-              <a:shade val="50000"/>
-            </a:schemeClr>
-          </a:lnRef>
-          <a:fillRef idx="1">
-            <a:schemeClr val="accent1"/>
-          </a:fillRef>
-          <a:effectRef idx="0">
-            <a:schemeClr val="accent1"/>
-          </a:effectRef>
-          <a:fontRef idx="minor">
-            <a:schemeClr val="lt1"/>
-          </a:fontRef>
-        </p:style>
-        <p:txBody>
-          <a:bodyPr rtlCol="0" anchor="ctr"/>
-          <a:lstStyle/>
-          <a:p>
-            <a:pPr algn="ctr"/>
-            <a:endParaRPr lang="en-US"/>
-          </a:p>
-        </p:txBody>
-      </p:sp>
     </p:spTree>
   </p:cSld>
   <p:clrMapOvr>
